--- a/docs/Red Team Final Presentation.pptx
+++ b/docs/Red Team Final Presentation.pptx
@@ -211,7 +211,7 @@
           <a:p>
             <a:fld id="{3635DB15-7D6E-4472-B99D-9906CF1DE234}" type="datetimeFigureOut">
               <a:rPr lang="en-US" smtClean="0"/>
-              <a:t>10/4/2026</a:t>
+              <a:t>10/11/2026</a:t>
             </a:fld>
             <a:endParaRPr lang="en-US"/>
           </a:p>
@@ -1633,7 +1633,7 @@
           <a:p>
             <a:fld id="{DD5FEBA2-C475-4F4F-B1DA-6AC3BCF25491}" type="datetimeFigureOut">
               <a:rPr lang="en-US" smtClean="0"/>
-              <a:t>10/4/2026</a:t>
+              <a:t>10/11/2026</a:t>
             </a:fld>
             <a:endParaRPr lang="en-US"/>
           </a:p>
@@ -1831,7 +1831,7 @@
           <a:p>
             <a:fld id="{DD5FEBA2-C475-4F4F-B1DA-6AC3BCF25491}" type="datetimeFigureOut">
               <a:rPr lang="en-US" smtClean="0"/>
-              <a:t>10/4/2026</a:t>
+              <a:t>10/11/2026</a:t>
             </a:fld>
             <a:endParaRPr lang="en-US"/>
           </a:p>
@@ -2039,7 +2039,7 @@
           <a:p>
             <a:fld id="{DD5FEBA2-C475-4F4F-B1DA-6AC3BCF25491}" type="datetimeFigureOut">
               <a:rPr lang="en-US" smtClean="0"/>
-              <a:t>10/4/2026</a:t>
+              <a:t>10/11/2026</a:t>
             </a:fld>
             <a:endParaRPr lang="en-US"/>
           </a:p>
@@ -2137,7 +2137,7 @@
     </p:spTree>
     <p:extLst>
       <p:ext uri="{BB962C8B-B14F-4D97-AF65-F5344CB8AC3E}">
-        <p14:creationId xmlns:p14="http://schemas.microsoft.com/office/powerpoint/2010/main" val="859035783"/>
+        <p14:creationId xmlns:p14="http://schemas.microsoft.com/office/powerpoint/2010/main" val="3659857195"/>
       </p:ext>
     </p:extLst>
   </p:cSld>
@@ -2272,7 +2272,7 @@
           <a:p>
             <a:fld id="{DD5FEBA2-C475-4F4F-B1DA-6AC3BCF25491}" type="datetimeFigureOut">
               <a:rPr lang="en-US" smtClean="0"/>
-              <a:t>10/4/2026</a:t>
+              <a:t>10/11/2026</a:t>
             </a:fld>
             <a:endParaRPr lang="en-US"/>
           </a:p>
@@ -2547,7 +2547,7 @@
           <a:p>
             <a:fld id="{DD5FEBA2-C475-4F4F-B1DA-6AC3BCF25491}" type="datetimeFigureOut">
               <a:rPr lang="en-US" smtClean="0"/>
-              <a:t>10/4/2026</a:t>
+              <a:t>10/11/2026</a:t>
             </a:fld>
             <a:endParaRPr lang="en-US"/>
           </a:p>
@@ -2812,7 +2812,7 @@
           <a:p>
             <a:fld id="{DD5FEBA2-C475-4F4F-B1DA-6AC3BCF25491}" type="datetimeFigureOut">
               <a:rPr lang="en-US" smtClean="0"/>
-              <a:t>10/4/2026</a:t>
+              <a:t>10/11/2026</a:t>
             </a:fld>
             <a:endParaRPr lang="en-US"/>
           </a:p>
@@ -3224,7 +3224,7 @@
           <a:p>
             <a:fld id="{DD5FEBA2-C475-4F4F-B1DA-6AC3BCF25491}" type="datetimeFigureOut">
               <a:rPr lang="en-US" smtClean="0"/>
-              <a:t>10/4/2026</a:t>
+              <a:t>10/11/2026</a:t>
             </a:fld>
             <a:endParaRPr lang="en-US"/>
           </a:p>
@@ -3365,7 +3365,7 @@
           <a:p>
             <a:fld id="{DD5FEBA2-C475-4F4F-B1DA-6AC3BCF25491}" type="datetimeFigureOut">
               <a:rPr lang="en-US" smtClean="0"/>
-              <a:t>10/4/2026</a:t>
+              <a:t>10/11/2026</a:t>
             </a:fld>
             <a:endParaRPr lang="en-US"/>
           </a:p>
@@ -3478,7 +3478,7 @@
           <a:p>
             <a:fld id="{DD5FEBA2-C475-4F4F-B1DA-6AC3BCF25491}" type="datetimeFigureOut">
               <a:rPr lang="en-US" smtClean="0"/>
-              <a:t>10/4/2026</a:t>
+              <a:t>10/11/2026</a:t>
             </a:fld>
             <a:endParaRPr lang="en-US"/>
           </a:p>
@@ -3789,7 +3789,7 @@
           <a:p>
             <a:fld id="{DD5FEBA2-C475-4F4F-B1DA-6AC3BCF25491}" type="datetimeFigureOut">
               <a:rPr lang="en-US" smtClean="0"/>
-              <a:t>10/4/2026</a:t>
+              <a:t>10/11/2026</a:t>
             </a:fld>
             <a:endParaRPr lang="en-US"/>
           </a:p>
@@ -4077,7 +4077,7 @@
           <a:p>
             <a:fld id="{DD5FEBA2-C475-4F4F-B1DA-6AC3BCF25491}" type="datetimeFigureOut">
               <a:rPr lang="en-US" smtClean="0"/>
-              <a:t>10/4/2026</a:t>
+              <a:t>10/11/2026</a:t>
             </a:fld>
             <a:endParaRPr lang="en-US"/>
           </a:p>
@@ -4318,7 +4318,7 @@
           <a:p>
             <a:fld id="{DD5FEBA2-C475-4F4F-B1DA-6AC3BCF25491}" type="datetimeFigureOut">
               <a:rPr lang="en-US" smtClean="0"/>
-              <a:t>10/4/2026</a:t>
+              <a:t>10/11/2026</a:t>
             </a:fld>
             <a:endParaRPr lang="en-US"/>
           </a:p>
@@ -14031,7 +14031,7 @@
               </a:defRPr>
             </a:pPr>
             <a:r>
-              <a:t>How the prototype stores guests, room types, room inventory, reservations, and contact messages.</a:t>
+              <a:t>Relationships behind booking and guest history.</a:t>
             </a:r>
           </a:p>
         </p:txBody>
@@ -14113,7 +14113,7 @@
               </a:defRPr>
             </a:pPr>
             <a:r>
-              <a:t>What the ERD supports</a:t>
+              <a:t>How the tables connect</a:t>
             </a:r>
           </a:p>
         </p:txBody>
@@ -14152,7 +14152,7 @@
               </a:defRPr>
             </a:pPr>
             <a:r>
-              <a:t>Customers create reservations and can return later to review booking history.</a:t>
+              <a:t>Customers → reservations</a:t>
             </a:r>
           </a:p>
           <a:p>
@@ -14168,7 +14168,7 @@
               </a:defRPr>
             </a:pPr>
             <a:r>
-              <a:t>Room_Types define the room name, nightly price, and max occupancy used by the site.</a:t>
+              <a:t>Room types → prices and occupancy</a:t>
             </a:r>
           </a:p>
           <a:p>
@@ -14184,7 +14184,7 @@
               </a:defRPr>
             </a:pPr>
             <a:r>
-              <a:t>Rooms connect physical room numbers to a room type and control whether a room can be reserved.</a:t>
+              <a:t>Rooms → available room numbers</a:t>
             </a:r>
           </a:p>
           <a:p>
@@ -14200,7 +14200,7 @@
               </a:defRPr>
             </a:pPr>
             <a:r>
-              <a:t>Reservation_Rooms links each reservation to the assigned room and stores the nightly rate used at booking.</a:t>
+              <a:t>Reservation rooms → booking details</a:t>
             </a:r>
           </a:p>
           <a:p>
@@ -14216,7 +14216,7 @@
               </a:defRPr>
             </a:pPr>
             <a:r>
-              <a:t>Contact_Messages keeps guest questions separate from reservation data while still supporting the Contact page.</a:t>
+              <a:t>Contact messages → guest questions</a:t>
             </a:r>
           </a:p>
         </p:txBody>
@@ -14298,7 +14298,7 @@
               </a:defRPr>
             </a:pPr>
             <a:r>
-              <a:t>This structure supports room availability checks, reservation summary totals, reservation history, and contact form testing.</a:t>
+              <a:t>Supports availability, bookings, history, and contact.</a:t>
             </a:r>
           </a:p>
         </p:txBody>
@@ -14402,7 +14402,7 @@
               </a:defRPr>
             </a:pPr>
             <a:r>
-              <a:t>Each test includes the purpose, expected behavior, and screenshot evidence from the working prototype.</a:t>
+              <a:t>Five key tests passed. Screenshots show the results.</a:t>
             </a:r>
           </a:p>
         </p:txBody>
@@ -14636,7 +14636,7 @@
               </a:defRPr>
             </a:pPr>
             <a:r>
-              <a:t>Verify Reservation Lookup Connects to the Database</a:t>
+              <a:t>Reservation History Loads</a:t>
             </a:r>
           </a:p>
           <a:p>
@@ -14652,7 +14652,7 @@
               </a:defRPr>
             </a:pPr>
             <a:r>
-              <a:t>Confirms a logged-in guest can open reservation history and see records pulled from the database.</a:t>
+              <a:t>Saved customer reservations are shown.</a:t>
             </a:r>
           </a:p>
         </p:txBody>
@@ -14688,7 +14688,7 @@
               </a:defRPr>
             </a:pPr>
             <a:r>
-              <a:t>Passed. Saved reservations loaded with check-in date, check-out date, and total price.</a:t>
+              <a:t>Passed: dates and totals loaded.</a:t>
             </a:r>
           </a:p>
         </p:txBody>
@@ -14770,7 +14770,7 @@
               </a:defRPr>
             </a:pPr>
             <a:r>
-              <a:t>Verify Reservation Details Expand</a:t>
+              <a:t>Reservation Details Expand</a:t>
             </a:r>
           </a:p>
           <a:p>
@@ -14786,7 +14786,7 @@
               </a:defRPr>
             </a:pPr>
             <a:r>
-              <a:t>Checks that a reservation can expand to show the room type, room number, nightly rate, nights, and subtotal.</a:t>
+              <a:t>Room information opens on selection.</a:t>
             </a:r>
           </a:p>
         </p:txBody>
@@ -14822,7 +14822,7 @@
               </a:defRPr>
             </a:pPr>
             <a:r>
-              <a:t>Passed. Expanded details displayed the expected room rows and matching subtotal values.</a:t>
+              <a:t>Passed: room rows and subtotals match.</a:t>
             </a:r>
           </a:p>
         </p:txBody>
@@ -14904,7 +14904,7 @@
               </a:defRPr>
             </a:pPr>
             <a:r>
-              <a:t>About Page Loads with Merged Contact Section</a:t>
+              <a:t>About + Contact Form</a:t>
             </a:r>
           </a:p>
           <a:p>
@@ -14920,7 +14920,7 @@
               </a:defRPr>
             </a:pPr>
             <a:r>
-              <a:t>Verifies the merged About and Contact content loads together, including the contact form fields.</a:t>
+              <a:t>The combined page loads correctly.</a:t>
             </a:r>
           </a:p>
         </p:txBody>
@@ -14956,7 +14956,7 @@
               </a:defRPr>
             </a:pPr>
             <a:r>
-              <a:t>Passed. The page loaded contact details and the inquiry form without breaking the layout.</a:t>
+              <a:t>Passed: inquiry fields are visible.</a:t>
             </a:r>
           </a:p>
         </p:txBody>
@@ -15038,7 +15038,7 @@
               </a:defRPr>
             </a:pPr>
             <a:r>
-              <a:t>Room Available for Selected Dates</a:t>
+              <a:t>Booking Summary</a:t>
             </a:r>
           </a:p>
           <a:p>
@@ -15054,7 +15054,7 @@
               </a:defRPr>
             </a:pPr>
             <a:r>
-              <a:t>Confirms a valid room request can continue to the summary page and calculate the stay total.</a:t>
+              <a:t>Guests review their selected stay.</a:t>
             </a:r>
           </a:p>
         </p:txBody>
@@ -15090,7 +15090,7 @@
               </a:defRPr>
             </a:pPr>
             <a:r>
-              <a:t>Passed. The summary showed the selected room, dates, guest count, nightly rate, and total.</a:t>
+              <a:t>Passed: dates and total match.</a:t>
             </a:r>
           </a:p>
         </p:txBody>
@@ -15172,7 +15172,7 @@
               </a:defRPr>
             </a:pPr>
             <a:r>
-              <a:t>Insufficient Rooms Are Rejected</a:t>
+              <a:t>Availability Checks</a:t>
             </a:r>
           </a:p>
           <a:p>
@@ -15188,7 +15188,7 @@
               </a:defRPr>
             </a:pPr>
             <a:r>
-              <a:t>Tests that the reservation form blocks a request when the guest asks for more rooms than available.</a:t>
+              <a:t>Too many requested rooms are blocked.</a:t>
             </a:r>
           </a:p>
         </p:txBody>
@@ -15224,7 +15224,7 @@
               </a:defRPr>
             </a:pPr>
             <a:r>
-              <a:t>Passed. The page showed a clear availability message and stopped the reservation from continuing.</a:t>
+              <a:t>Passed: clear availability warning.</a:t>
             </a:r>
           </a:p>
         </p:txBody>
